--- a/examples/repositories/cyberppt/pages/slide-02.pptx
+++ b/examples/repositories/cyberppt/pages/slide-02.pptx
@@ -883,7 +883,7 @@
         </p:nvSpPr>
         <p:spPr>
           <a:xfrm>
-            <a:off x="291667" y="349824"/>
+            <a:off x="284376" y="357112"/>
             <a:ext cx="379168" cy="357112"/>
           </a:xfrm>
           <a:prstGeom prst="rect">
@@ -945,7 +945,7 @@
         </p:nvSpPr>
         <p:spPr>
           <a:xfrm>
-            <a:off x="1028127" y="196776"/>
+            <a:off x="991669" y="291520"/>
             <a:ext cx="10645858" cy="583039"/>
           </a:xfrm>
           <a:prstGeom prst="rect">
@@ -984,7 +984,7 @@
         </p:nvSpPr>
         <p:spPr>
           <a:xfrm>
-            <a:off x="1035419" y="838119"/>
+            <a:off x="1057294" y="816255"/>
             <a:ext cx="10791692" cy="327960"/>
           </a:xfrm>
           <a:prstGeom prst="rect">
@@ -1046,7 +1046,7 @@
         </p:nvSpPr>
         <p:spPr>
           <a:xfrm>
-            <a:off x="284376" y="1552342"/>
+            <a:off x="269792" y="1581494"/>
             <a:ext cx="6562515" cy="357112"/>
           </a:xfrm>
           <a:prstGeom prst="rect">
@@ -1085,7 +1085,7 @@
         </p:nvSpPr>
         <p:spPr>
           <a:xfrm>
-            <a:off x="1050002" y="2186397"/>
+            <a:off x="1115628" y="2215549"/>
             <a:ext cx="2078130" cy="327960"/>
           </a:xfrm>
           <a:prstGeom prst="rect">
@@ -1124,7 +1124,7 @@
         </p:nvSpPr>
         <p:spPr>
           <a:xfrm>
-            <a:off x="5760430" y="2186397"/>
+            <a:off x="5818764" y="2215549"/>
             <a:ext cx="729168" cy="327960"/>
           </a:xfrm>
           <a:prstGeom prst="rect">
@@ -1229,7 +1229,7 @@
         </p:nvSpPr>
         <p:spPr>
           <a:xfrm>
-            <a:off x="729168" y="2776725"/>
+            <a:off x="765627" y="2813165"/>
             <a:ext cx="2019796" cy="364400"/>
           </a:xfrm>
           <a:prstGeom prst="rect">
@@ -1295,7 +1295,7 @@
         </p:nvSpPr>
         <p:spPr>
           <a:xfrm>
-            <a:off x="729168" y="3629420"/>
+            <a:off x="758335" y="3665860"/>
             <a:ext cx="2019796" cy="364400"/>
           </a:xfrm>
           <a:prstGeom prst="rect">
@@ -1361,7 +1361,7 @@
         </p:nvSpPr>
         <p:spPr>
           <a:xfrm>
-            <a:off x="729168" y="4482115"/>
+            <a:off x="758335" y="4511267"/>
             <a:ext cx="2019796" cy="364400"/>
           </a:xfrm>
           <a:prstGeom prst="rect">
@@ -1427,8 +1427,8 @@
         </p:nvSpPr>
         <p:spPr>
           <a:xfrm>
-            <a:off x="4681261" y="3527388"/>
-            <a:ext cx="2909382" cy="553887"/>
+            <a:off x="4739594" y="3520100"/>
+            <a:ext cx="3026049" cy="553887"/>
           </a:xfrm>
           <a:prstGeom prst="rect">
             <a:avLst/>
@@ -1493,7 +1493,7 @@
         </p:nvSpPr>
         <p:spPr>
           <a:xfrm>
-            <a:off x="8983354" y="3439932"/>
+            <a:off x="9041688" y="3425356"/>
             <a:ext cx="2807298" cy="728799"/>
           </a:xfrm>
           <a:prstGeom prst="rect">
@@ -1518,7 +1518,7 @@
                 <a:ea typeface="Yu Gothic" pitchFamily="34" charset="-122"/>
                 <a:cs typeface="Yu Gothic" pitchFamily="34" charset="-120"/>
               </a:rPr>
-              <a:t>各店の詳しい案内への</a:t>
+              <a:t>各店の詳しい案内</a:t>
             </a:r>
             <a:endParaRPr lang="en-US" sz="1900" dirty="0"/>
           </a:p>
@@ -1535,7 +1535,7 @@
                 <a:ea typeface="Yu Gothic" pitchFamily="34" charset="-122"/>
                 <a:cs typeface="Yu Gothic" pitchFamily="34" charset="-120"/>
               </a:rPr>
-              <a:t>リンク</a:t>
+              <a:t>へのリンク</a:t>
             </a:r>
             <a:endParaRPr lang="en-US" sz="1900" dirty="0"/>
           </a:p>
@@ -1645,7 +1645,7 @@
         </p:nvSpPr>
         <p:spPr>
           <a:xfrm>
-            <a:off x="284376" y="5312946"/>
+            <a:off x="284376" y="5298370"/>
             <a:ext cx="3645842" cy="262368"/>
           </a:xfrm>
           <a:prstGeom prst="rect">
@@ -1707,7 +1707,7 @@
         </p:nvSpPr>
         <p:spPr>
           <a:xfrm>
-            <a:off x="291667" y="6063609"/>
+            <a:off x="291667" y="6078185"/>
             <a:ext cx="9406272" cy="451855"/>
           </a:xfrm>
           <a:prstGeom prst="rect">
@@ -1746,8 +1746,8 @@
         </p:nvSpPr>
         <p:spPr>
           <a:xfrm>
-            <a:off x="9829190" y="6376993"/>
-            <a:ext cx="2107297" cy="225928"/>
+            <a:off x="291667" y="6559192"/>
+            <a:ext cx="11608361" cy="189488"/>
           </a:xfrm>
           <a:prstGeom prst="rect">
             <a:avLst/>
@@ -1763,9 +1763,9 @@
               <a:buNone/>
             </a:pPr>
             <a:r>
-              <a:rPr lang="en-US" sz="800" dirty="0">
+              <a:rPr lang="en-US" sz="1100" dirty="0">
                 <a:solidFill>
-                  <a:srgbClr val="161616"/>
+                  <a:srgbClr val="514B44"/>
                 </a:solidFill>
                 <a:latin typeface="Yu Gothic" pitchFamily="34" charset="0"/>
                 <a:ea typeface="Yu Gothic" pitchFamily="34" charset="-122"/>
@@ -1773,7 +1773,7 @@
               </a:rPr>
               <a:t>架空の企画例。課題は検証前の仮説です。</a:t>
             </a:r>
-            <a:endParaRPr lang="en-US" sz="800" dirty="0"/>
+            <a:endParaRPr lang="en-US" sz="1100" dirty="0"/>
           </a:p>
         </p:txBody>
       </p:sp>
